--- a/Documents/Reports/Insights_&_Actionable_Decisions.pptx
+++ b/Documents/Reports/Insights_&_Actionable_Decisions.pptx
@@ -584,7 +584,10 @@
           <a:bodyPr/>
           <a:lstStyle/>
           <a:p>
-            <a:endParaRPr lang="en-US" dirty="0"/>
+            <a:r>
+              <a:rPr lang="en-US" dirty="0"/>
+              <a:t>Wording on this slide comes from the scored data: High-tier applications occur in all fourteen months, peak at 70 in October 2025, and hold a 17-28% share of monthly volume throughout. The chart shown is the Power BI dashboard visual and does not yet reflect this - it joins the segmentation output (no date field) to the cleaned data on company name, which is not unique, so it plots each month’s total against a single tier. The dashboard visual needs rebuilding.</a:t>
+            </a:r>
           </a:p>
         </p:txBody>
       </p:sp>
@@ -754,7 +757,7 @@
           <a:p>
             <a:r>
               <a:rPr lang="en-US" dirty="0"/>
-              <a:t>245 already exceeds prior-round matching totals: 90 in the 2023 pilot, 190 in 2024. Average ask R13.2m against average revenue R16.5m.</a:t>
+              <a:t>245 is the investor-ready shortlist; 90 (2023 pilot) and 190 (2024) were matches actually made — related figures, but not the same measure. Average ask R13.2m against average revenue R16.5m.</a:t>
             </a:r>
           </a:p>
         </p:txBody>
@@ -841,7 +844,7 @@
           <a:p>
             <a:r>
               <a:rPr lang="en-US" dirty="0"/>
-              <a:t>Correction to the earlier README: Mid carries the largest absolute job promise, not High. Mid jobs multiple is 4.4x its current headcount; treat the promise as ambitious but the capital efficiency as real.</a:t>
+              <a:t>Mid carries the largest absolute job promise of any tier, ahead of High. Mid jobs multiple is 4.4x its current headcount; treat the promise as ambitious but the capital efficiency as real.</a:t>
             </a:r>
           </a:p>
         </p:txBody>
@@ -1186,7 +1189,7 @@
           <a:p>
             <a:r>
               <a:rPr lang="en-US" dirty="0"/>
-              <a:t>Note the correction: the Mid tier carries the largest absolute job promise (11,751), slightly ahead of High (11,436). High is the most credible deliverer; Mid is the largest.</a:t>
+              <a:t>The Mid tier carries the largest absolute job promise (11,751), slightly ahead of High (11,436). High is the most credible deliverer; Mid is the largest.</a:t>
             </a:r>
           </a:p>
         </p:txBody>
@@ -2820,7 +2823,7 @@
                 <a:ea typeface="Cambria" pitchFamily="34" charset="-122"/>
                 <a:cs typeface="Cambria" pitchFamily="34" charset="-120"/>
               </a:rPr>
-              <a:t>The best businesses applied first</a:t>
+              <a:t>Volume swings; quality holds steady</a:t>
             </a:r>
             <a:endParaRPr lang="en-US" sz="3000" dirty="0"/>
           </a:p>
@@ -2922,7 +2925,7 @@
                 <a:ea typeface="Calibri" pitchFamily="34" charset="-122"/>
                 <a:cs typeface="Calibri" pitchFamily="34" charset="-120"/>
               </a:rPr>
-              <a:t>The entire High tier arrived and closed out inside the first quarter of a thirteen-month campaign.</a:t>
+              <a:t>Investor-ready businesses arrived in every month of the campaign, not only in its opening quarter.</a:t>
             </a:r>
             <a:endParaRPr lang="en-US" sz="1250" dirty="0"/>
           </a:p>
@@ -2964,7 +2967,7 @@
                 <a:ea typeface="Calibri" pitchFamily="34" charset="-122"/>
                 <a:cs typeface="Calibri" pitchFamily="34" charset="-120"/>
               </a:rPr>
-              <a:t>This is a reputation signal: the most credible operators moved first because they already trusted the initiative from the 2023 and 2024 rounds.</a:t>
+              <a:t>Two thirds of the High tier — 161 of 245 — applied from September 2025 onward. October alone produced 70, more than any other month.</a:t>
             </a:r>
             <a:endParaRPr lang="en-US" sz="1200" dirty="0"/>
           </a:p>
@@ -3108,7 +3111,7 @@
                 <a:ea typeface="Calibri" pitchFamily="34" charset="-122"/>
                 <a:cs typeface="Calibri" pitchFamily="34" charset="-120"/>
               </a:rPr>
-              <a:t>High — Jun to Aug 2025</a:t>
+              <a:t>High — present all year</a:t>
             </a:r>
             <a:endParaRPr lang="en-US" sz="1200" dirty="0"/>
           </a:p>
@@ -3150,7 +3153,7 @@
                 <a:ea typeface="Calibri" pitchFamily="34" charset="-122"/>
                 <a:cs typeface="Calibri" pitchFamily="34" charset="-120"/>
               </a:rPr>
-              <a:t>Peaked in July, gone by September. Nothing High-tier arrived in the next ten months.</a:t>
+              <a:t>Peaks at 70 in October, ahead of 52 in July. Never absent in any month of the run.</a:t>
             </a:r>
             <a:endParaRPr lang="en-US" sz="1150" dirty="0"/>
           </a:p>
@@ -3221,7 +3224,7 @@
                 <a:ea typeface="Calibri" pitchFamily="34" charset="-122"/>
                 <a:cs typeface="Calibri" pitchFamily="34" charset="-120"/>
               </a:rPr>
-              <a:t>Mid — peaks Oct 2025</a:t>
+              <a:t>Mid — the volume engine</a:t>
             </a:r>
             <a:endParaRPr lang="en-US" sz="1200" dirty="0"/>
           </a:p>
@@ -3263,7 +3266,7 @@
                 <a:ea typeface="Calibri" pitchFamily="34" charset="-122"/>
                 <a:cs typeface="Calibri" pitchFamily="34" charset="-120"/>
               </a:rPr>
-              <a:t>Steady through the first half, peaking near 272, then falling away sharply.</a:t>
+              <a:t>Peaks at 135 in October and is the largest tier in eleven of fourteen months.</a:t>
             </a:r>
             <a:endParaRPr lang="en-US" sz="1150" dirty="0"/>
           </a:p>
@@ -3334,7 +3337,7 @@
                 <a:ea typeface="Calibri" pitchFamily="34" charset="-122"/>
                 <a:cs typeface="Calibri" pitchFamily="34" charset="-120"/>
               </a:rPr>
-              <a:t>Low — the long tail</a:t>
+              <a:t>Low — moves with Mid</a:t>
             </a:r>
             <a:endParaRPr lang="en-US" sz="1200" dirty="0"/>
           </a:p>
@@ -3376,7 +3379,7 @@
                 <a:ea typeface="Calibri" pitchFamily="34" charset="-122"/>
                 <a:cs typeface="Calibri" pitchFamily="34" charset="-120"/>
               </a:rPr>
-              <a:t>Rose to Nov 2025, then a trickle to May 2026. The back half produced little worth funding.</a:t>
+              <a:t>Peaks at 68 in October and November. Volume falls after November across all tiers alike.</a:t>
             </a:r>
             <a:endParaRPr lang="en-US" sz="1150" dirty="0"/>
           </a:p>
@@ -3923,7 +3926,7 @@
                 <a:ea typeface="Calibri" pitchFamily="34" charset="-122"/>
                 <a:cs typeface="Calibri" pitchFamily="34" charset="-120"/>
               </a:rPr>
-              <a:t>Mpumalanga down to the Northern Cape barely register. Unreached market, not empty market.</a:t>
+              <a:t>Mpumalanga down to the Northern Cape barely register. Six provinces the initiative has never visited in person.</a:t>
             </a:r>
             <a:endParaRPr lang="en-US" sz="1150" dirty="0"/>
           </a:p>
@@ -7974,7 +7977,7 @@
                 <a:ea typeface="Cambria" pitchFamily="34" charset="-122"/>
                 <a:cs typeface="Cambria" pitchFamily="34" charset="-120"/>
               </a:rPr>
-              <a:t>Staff the first quarter, shorten the tail</a:t>
+              <a:t>Quality arrives all year — match as you go</a:t>
             </a:r>
             <a:endParaRPr lang="en-US" sz="1800" dirty="0"/>
           </a:p>
@@ -8048,7 +8051,7 @@
                 <a:ea typeface="Calibri" pitchFamily="34" charset="-122"/>
                 <a:cs typeface="Calibri" pitchFamily="34" charset="-120"/>
               </a:rPr>
-              <a:t>Every High-tier business applied between June and August 2025. The remaining ten months produced no investor-ready applicants at all.</a:t>
+              <a:t>High-tier businesses applied in all fourteen months. Two thirds of them — 161 of 245 — arrived from September 2025 onward, not in the opening quarter.</a:t>
             </a:r>
             <a:endParaRPr lang="en-US" sz="1150" dirty="0"/>
           </a:p>
@@ -8122,7 +8125,7 @@
                 <a:ea typeface="Calibri" pitchFamily="34" charset="-122"/>
                 <a:cs typeface="Calibri" pitchFamily="34" charset="-120"/>
               </a:rPr>
-              <a:t>Put review capacity at the front of the window and begin matching while applications are still open, rather than waiting for the campaign to close.</a:t>
+              <a:t>Begin matching while applications are still open. Investor-ready businesses arrive every month, so waiting for the close holds up the majority of them.</a:t>
             </a:r>
             <a:endParaRPr lang="en-US" sz="1150" dirty="0"/>
           </a:p>
@@ -8196,7 +8199,7 @@
                 <a:ea typeface="Calibri" pitchFamily="34" charset="-122"/>
                 <a:cs typeface="Calibri" pitchFamily="34" charset="-120"/>
               </a:rPr>
-              <a:t>A thirteen-month window is longer than the data justifies. A shorter, harder-marketed window would concentrate quality and free the team to start matching sooner.</a:t>
+              <a:t>The High tier holds a steady 17–28% share of monthly volume. Total applications, not timing, decide how many investor-ready businesses a round yields.</a:t>
             </a:r>
             <a:endParaRPr lang="en-US" sz="1150" dirty="0"/>
           </a:p>
@@ -8270,7 +8273,7 @@
                 <a:ea typeface="Calibri" pitchFamily="34" charset="-122"/>
                 <a:cs typeface="Calibri" pitchFamily="34" charset="-120"/>
               </a:rPr>
-              <a:t>Whatever marketing ran in the opening months is what produced the High tier. Identify it and repeat it deliberately.</a:t>
+              <a:t>October produced more applications than any other month. Identify what drove that peak and repeat it deliberately.</a:t>
             </a:r>
             <a:endParaRPr lang="en-US" sz="1150" dirty="0"/>
           </a:p>
@@ -8530,7 +8533,7 @@
                 <a:ea typeface="Calibri" pitchFamily="34" charset="-122"/>
                 <a:cs typeface="Calibri" pitchFamily="34" charset="-120"/>
               </a:rPr>
-              <a:t>Six provinces barely register. This is unreached market rather than an absence of eligible businesses.</a:t>
+              <a:t>Six provinces barely register. There are eligible businesses there; no one has been to find them.</a:t>
             </a:r>
             <a:endParaRPr lang="en-US" sz="1150" dirty="0"/>
           </a:p>
@@ -8717,7 +8720,7 @@
                 <a:ea typeface="Calibri" pitchFamily="34" charset="-122"/>
                 <a:cs typeface="Calibri" pitchFamily="34" charset="-120"/>
               </a:rPr>
-              <a:t>The campaign has already proved it can attract quality. The finding is that it attracts quality early and locally — so run it shorter, and run it somewhere new.</a:t>
+              <a:t>The campaign has already proved it can attract quality. It attracts that quality steadily but locally — so match as you go, and run the next round somewhere new.</a:t>
             </a:r>
             <a:endParaRPr lang="en-US" sz="1200" dirty="0"/>
           </a:p>
@@ -9858,7 +9861,7 @@
                 <a:ea typeface="Calibri" pitchFamily="34" charset="-122"/>
                 <a:cs typeface="Calibri" pitchFamily="34" charset="-120"/>
               </a:rPr>
-              <a:t>Collective asking amount less than the collective revenue. </a:t>
+              <a:t>Asks less, collectively, than it earns. </a:t>
             </a:r>
             <a:r>
               <a:rPr lang="en-GB" sz="1200" dirty="0">
@@ -9869,7 +9872,7 @@
                 <a:ea typeface="Calibri" pitchFamily="34" charset="-122"/>
                 <a:cs typeface="Calibri" pitchFamily="34" charset="-120"/>
               </a:rPr>
-              <a:t>most realistic projection of job growth. </a:t>
+              <a:t>The most credible projection of job growth in the pool, and the </a:t>
             </a:r>
             <a:r>
               <a:rPr lang="en-US" sz="1200" dirty="0">
@@ -9880,7 +9883,7 @@
                 <a:ea typeface="Calibri" pitchFamily="34" charset="-122"/>
                 <a:cs typeface="Calibri" pitchFamily="34" charset="-120"/>
               </a:rPr>
-              <a:t>Strongest transformation profile. Most ready to present to investors</a:t>
+              <a:t>strongest transformation profile. Ready to present to investors now.</a:t>
             </a:r>
             <a:endParaRPr lang="en-US" sz="1200" dirty="0"/>
           </a:p>
@@ -10144,7 +10147,7 @@
                 <a:ea typeface="Calibri" pitchFamily="34" charset="-122"/>
                 <a:cs typeface="Calibri" pitchFamily="34" charset="-120"/>
               </a:rPr>
-              <a:t>The largest SME application pool with biggest job number projection. Genuine trading businesses with gaps that are correctable</a:t>
+              <a:t>The largest tier, and the biggest job projection of the three. Genuine trading businesses whose gaps are correctable</a:t>
             </a:r>
             <a:endParaRPr lang="en-US" sz="1200" dirty="0"/>
           </a:p>
@@ -11707,7 +11710,7 @@
                 <a:ea typeface="Calibri" pitchFamily="34" charset="-122"/>
                 <a:cs typeface="Calibri" pitchFamily="34" charset="-120"/>
               </a:rPr>
-              <a:t>66 – 100</a:t>
+              <a:t>62 – 100</a:t>
             </a:r>
             <a:endParaRPr lang="en-US" sz="1300" dirty="0"/>
           </a:p>
@@ -11817,7 +11820,7 @@
                 <a:ea typeface="Calibri" pitchFamily="34" charset="-122"/>
                 <a:cs typeface="Calibri" pitchFamily="34" charset="-120"/>
               </a:rPr>
-              <a:t>46 – 65</a:t>
+              <a:t>48 – 61</a:t>
             </a:r>
             <a:endParaRPr lang="en-US" sz="1300" dirty="0"/>
           </a:p>
@@ -11927,7 +11930,7 @@
                 <a:ea typeface="Calibri" pitchFamily="34" charset="-122"/>
                 <a:cs typeface="Calibri" pitchFamily="34" charset="-120"/>
               </a:rPr>
-              <a:t>0 – 45</a:t>
+              <a:t>0 – 47</a:t>
             </a:r>
             <a:endParaRPr lang="en-US" sz="1300" dirty="0"/>
           </a:p>
@@ -12011,7 +12014,7 @@
               <a:t>A missing answer scores neutral (0.5 points), never zero. No business is penalised for a gap the form itself created, which is why the Low tier is a group to be worked on, not a final assessment of their </a:t>
             </a:r>
             <a:r>
-              <a:rPr lang="en-US" sz="1150" dirty="0" err="1">
+              <a:rPr lang="en-US" sz="1150" dirty="0">
                 <a:solidFill>
                   <a:srgbClr val="CBD5E1"/>
                 </a:solidFill>
@@ -12019,7 +12022,7 @@
                 <a:ea typeface="Calibri" pitchFamily="34" charset="-122"/>
                 <a:cs typeface="Calibri" pitchFamily="34" charset="-120"/>
               </a:rPr>
-              <a:t>viablilty</a:t>
+              <a:t>viability</a:t>
             </a:r>
             <a:r>
               <a:rPr lang="en-US" sz="1150" dirty="0">
@@ -12429,7 +12432,7 @@
                 <a:ea typeface="Calibri" pitchFamily="34" charset="-122"/>
                 <a:cs typeface="Calibri" pitchFamily="34" charset="-120"/>
               </a:rPr>
-              <a:t>245 need no preparation. They are already more than the 90 matched in 2023 and the 190 in 2024.</a:t>
+              <a:t>245 need no preparation. Prior rounds matched 90 businesses in 2023 and 190 in 2024 — those were completed matches; this is a ready shortlist.</a:t>
             </a:r>
             <a:endParaRPr lang="en-US" sz="1150" dirty="0"/>
           </a:p>
@@ -12542,7 +12545,7 @@
                 <a:ea typeface="Calibri" pitchFamily="34" charset="-122"/>
                 <a:cs typeface="Calibri" pitchFamily="34" charset="-120"/>
               </a:rPr>
-              <a:t>At 53.3%, too large to work case by case. It needs a programme, not a queue.</a:t>
+              <a:t>At 53.3%, too large to work case by case. Only a batched process can move it.</a:t>
             </a:r>
             <a:endParaRPr lang="en-US" sz="1150" dirty="0"/>
           </a:p>
@@ -13127,7 +13130,7 @@
                 <a:ea typeface="Cambria" pitchFamily="34" charset="-122"/>
                 <a:cs typeface="Cambria" pitchFamily="34" charset="-120"/>
               </a:rPr>
-              <a:t>55.2 vs 42.0</a:t>
+              <a:t>13.2 points</a:t>
             </a:r>
             <a:endParaRPr lang="en-US" sz="2000" dirty="0"/>
           </a:p>
@@ -13169,7 +13172,7 @@
                 <a:ea typeface="Calibri" pitchFamily="34" charset="-122"/>
                 <a:cs typeface="Calibri" pitchFamily="34" charset="-120"/>
               </a:rPr>
-              <a:t>is the gap the development programme has to close. Moving a Low-tier business up is a defined, measurable target.</a:t>
+              <a:t>separate the Mid tier average (55.2) from the Low tier average (42.0) — the gap the development programme has to close.</a:t>
             </a:r>
             <a:endParaRPr lang="en-US" sz="1100" dirty="0"/>
           </a:p>
@@ -13827,7 +13830,7 @@
                 <a:ea typeface="Calibri" pitchFamily="34" charset="-122"/>
                 <a:cs typeface="Calibri" pitchFamily="34" charset="-120"/>
               </a:rPr>
-              <a:t>New jobs anticipated against people already employed, by tier.</a:t>
+              <a:t>New jobs anticipated — as stated by applicants — against people already employed, by tier.</a:t>
             </a:r>
             <a:endParaRPr lang="en-US" sz="1400" dirty="0"/>
           </a:p>
@@ -15287,7 +15290,7 @@
                 <a:ea typeface="Calibri" pitchFamily="34" charset="-122"/>
                 <a:cs typeface="Calibri" pitchFamily="34" charset="-120"/>
               </a:rPr>
-              <a:t>Close to parity across every tier, and materially above the national SME average.</a:t>
+              <a:t>Close to parity across every tier — second only to Black ownership in the pool.</a:t>
             </a:r>
             <a:endParaRPr lang="en-US" sz="1100" dirty="0"/>
           </a:p>
